--- a/docs/presentaciones/classes/clase-142-mecanismos-de-atencion-presentacion.pptx
+++ b/docs/presentaciones/classes/clase-142-mecanismos-de-atencion-presentacion.pptx
@@ -4932,7 +4932,387 @@
                 </a:solidFill>
                 <a:latin typeface="Courier New"/>
               </a:rPr>
-              <a:t># Imports y configuración inicial</a:t>
+              <a:t>import numpy as np</a:t>
+            </a:r>
+          </a:p>
+          <a:p>
+            <a:pPr>
+              <a:defRPr sz="1200" b="0">
+                <a:solidFill>
+                  <a:srgbClr val="F8FAFC"/>
+                </a:solidFill>
+                <a:latin typeface="Courier New"/>
+              </a:defRPr>
+            </a:pPr>
+            <a:r>
+              <a:rPr sz="1200" b="0">
+                <a:solidFill>
+                  <a:srgbClr val="F8FAFC"/>
+                </a:solidFill>
+                <a:latin typeface="Courier New"/>
+              </a:rPr>
+              <a:t>from tensorflow import keras</a:t>
+            </a:r>
+          </a:p>
+          <a:p>
+            <a:pPr>
+              <a:defRPr sz="1200" b="0">
+                <a:solidFill>
+                  <a:srgbClr val="F8FAFC"/>
+                </a:solidFill>
+                <a:latin typeface="Courier New"/>
+              </a:defRPr>
+            </a:pPr>
+            <a:r>
+              <a:rPr sz="1200" b="0">
+                <a:solidFill>
+                  <a:srgbClr val="F8FAFC"/>
+                </a:solidFill>
+                <a:latin typeface="Courier New"/>
+              </a:rPr>
+              <a:t>from tensorflow.keras import layers</a:t>
+            </a:r>
+          </a:p>
+          <a:p>
+            <a:pPr>
+              <a:defRPr sz="1200" b="0">
+                <a:solidFill>
+                  <a:srgbClr val="F8FAFC"/>
+                </a:solidFill>
+                <a:latin typeface="Courier New"/>
+              </a:defRPr>
+            </a:pPr>
+            <a:r>
+              <a:rPr sz="1200" b="0">
+                <a:solidFill>
+                  <a:srgbClr val="F8FAFC"/>
+                </a:solidFill>
+                <a:latin typeface="Courier New"/>
+              </a:rPr>
+              <a:t>keras.utils.set_random_seed(42)</a:t>
+            </a:r>
+          </a:p>
+          <a:p>
+            <a:pPr>
+              <a:defRPr sz="1200" b="0">
+                <a:solidFill>
+                  <a:srgbClr val="F8FAFC"/>
+                </a:solidFill>
+                <a:latin typeface="Courier New"/>
+              </a:defRPr>
+            </a:pPr>
+            <a:r>
+              <a:rPr sz="1200" b="0">
+                <a:solidFill>
+                  <a:srgbClr val="F8FAFC"/>
+                </a:solidFill>
+                <a:latin typeface="Courier New"/>
+              </a:rPr>
+              <a:t>rng = np.random.default_rng(42)</a:t>
+            </a:r>
+          </a:p>
+          <a:p>
+            <a:pPr>
+              <a:defRPr sz="1200" b="0">
+                <a:solidFill>
+                  <a:srgbClr val="F8FAFC"/>
+                </a:solidFill>
+                <a:latin typeface="Courier New"/>
+              </a:defRPr>
+            </a:pPr>
+            <a:r>
+              <a:rPr sz="1200" b="0">
+                <a:solidFill>
+                  <a:srgbClr val="F8FAFC"/>
+                </a:solidFill>
+                <a:latin typeface="Courier New"/>
+              </a:rPr>
+              <a:t> </a:t>
+            </a:r>
+          </a:p>
+          <a:p>
+            <a:pPr>
+              <a:defRPr sz="1200" b="0">
+                <a:solidFill>
+                  <a:srgbClr val="F8FAFC"/>
+                </a:solidFill>
+                <a:latin typeface="Courier New"/>
+              </a:defRPr>
+            </a:pPr>
+            <a:r>
+              <a:rPr sz="1200" b="0">
+                <a:solidFill>
+                  <a:srgbClr val="F8FAFC"/>
+                </a:solidFill>
+                <a:latin typeface="Courier New"/>
+              </a:rPr>
+              <a:t>def softmax(x, axis=-1):</a:t>
+            </a:r>
+          </a:p>
+          <a:p>
+            <a:pPr>
+              <a:defRPr sz="1200" b="0">
+                <a:solidFill>
+                  <a:srgbClr val="F8FAFC"/>
+                </a:solidFill>
+                <a:latin typeface="Courier New"/>
+              </a:defRPr>
+            </a:pPr>
+            <a:r>
+              <a:rPr sz="1200" b="0">
+                <a:solidFill>
+                  <a:srgbClr val="F8FAFC"/>
+                </a:solidFill>
+                <a:latin typeface="Courier New"/>
+              </a:rPr>
+              <a:t>    x = x - x.max(axis=axis, keepdims=True)</a:t>
+            </a:r>
+          </a:p>
+          <a:p>
+            <a:pPr>
+              <a:defRPr sz="1200" b="0">
+                <a:solidFill>
+                  <a:srgbClr val="F8FAFC"/>
+                </a:solidFill>
+                <a:latin typeface="Courier New"/>
+              </a:defRPr>
+            </a:pPr>
+            <a:r>
+              <a:rPr sz="1200" b="0">
+                <a:solidFill>
+                  <a:srgbClr val="F8FAFC"/>
+                </a:solidFill>
+                <a:latin typeface="Courier New"/>
+              </a:rPr>
+              <a:t>    e = np.exp(x)</a:t>
+            </a:r>
+          </a:p>
+          <a:p>
+            <a:pPr>
+              <a:defRPr sz="1200" b="0">
+                <a:solidFill>
+                  <a:srgbClr val="F8FAFC"/>
+                </a:solidFill>
+                <a:latin typeface="Courier New"/>
+              </a:defRPr>
+            </a:pPr>
+            <a:r>
+              <a:rPr sz="1200" b="0">
+                <a:solidFill>
+                  <a:srgbClr val="F8FAFC"/>
+                </a:solidFill>
+                <a:latin typeface="Courier New"/>
+              </a:rPr>
+              <a:t>    return e / e.sum(axis=axis, keepdims=True)</a:t>
+            </a:r>
+          </a:p>
+          <a:p>
+            <a:pPr>
+              <a:defRPr sz="1200" b="0">
+                <a:solidFill>
+                  <a:srgbClr val="F8FAFC"/>
+                </a:solidFill>
+                <a:latin typeface="Courier New"/>
+              </a:defRPr>
+            </a:pPr>
+            <a:r>
+              <a:rPr sz="1200" b="0">
+                <a:solidFill>
+                  <a:srgbClr val="F8FAFC"/>
+                </a:solidFill>
+                <a:latin typeface="Courier New"/>
+              </a:rPr>
+              <a:t> </a:t>
+            </a:r>
+          </a:p>
+          <a:p>
+            <a:pPr>
+              <a:defRPr sz="1200" b="0">
+                <a:solidFill>
+                  <a:srgbClr val="F8FAFC"/>
+                </a:solidFill>
+                <a:latin typeface="Courier New"/>
+              </a:defRPr>
+            </a:pPr>
+            <a:r>
+              <a:rPr sz="1200" b="0">
+                <a:solidFill>
+                  <a:srgbClr val="F8FAFC"/>
+                </a:solidFill>
+                <a:latin typeface="Courier New"/>
+              </a:rPr>
+              <a:t>def atencion(Q, K, V):</a:t>
+            </a:r>
+          </a:p>
+          <a:p>
+            <a:pPr>
+              <a:defRPr sz="1200" b="0">
+                <a:solidFill>
+                  <a:srgbClr val="F8FAFC"/>
+                </a:solidFill>
+                <a:latin typeface="Courier New"/>
+              </a:defRPr>
+            </a:pPr>
+            <a:r>
+              <a:rPr sz="1200" b="0">
+                <a:solidFill>
+                  <a:srgbClr val="F8FAFC"/>
+                </a:solidFill>
+                <a:latin typeface="Courier New"/>
+              </a:rPr>
+              <a:t>    d = Q.shape[-1]</a:t>
+            </a:r>
+          </a:p>
+          <a:p>
+            <a:pPr>
+              <a:defRPr sz="1200" b="0">
+                <a:solidFill>
+                  <a:srgbClr val="F8FAFC"/>
+                </a:solidFill>
+                <a:latin typeface="Courier New"/>
+              </a:defRPr>
+            </a:pPr>
+            <a:r>
+              <a:rPr sz="1200" b="0">
+                <a:solidFill>
+                  <a:srgbClr val="F8FAFC"/>
+                </a:solidFill>
+                <a:latin typeface="Courier New"/>
+              </a:rPr>
+              <a:t>    pesos = softmax(Q @ K.T / np.sqrt(d))   # softmax(QK^T / sqrt(d))</a:t>
+            </a:r>
+          </a:p>
+          <a:p>
+            <a:pPr>
+              <a:defRPr sz="1200" b="0">
+                <a:solidFill>
+                  <a:srgbClr val="F8FAFC"/>
+                </a:solidFill>
+                <a:latin typeface="Courier New"/>
+              </a:defRPr>
+            </a:pPr>
+            <a:r>
+              <a:rPr sz="1200" b="0">
+                <a:solidFill>
+                  <a:srgbClr val="F8FAFC"/>
+                </a:solidFill>
+                <a:latin typeface="Courier New"/>
+              </a:rPr>
+              <a:t>    return pesos @ V, pesos</a:t>
+            </a:r>
+          </a:p>
+          <a:p>
+            <a:pPr>
+              <a:defRPr sz="1200" b="0">
+                <a:solidFill>
+                  <a:srgbClr val="F8FAFC"/>
+                </a:solidFill>
+                <a:latin typeface="Courier New"/>
+              </a:defRPr>
+            </a:pPr>
+            <a:r>
+              <a:rPr sz="1200" b="0">
+                <a:solidFill>
+                  <a:srgbClr val="F8FAFC"/>
+                </a:solidFill>
+                <a:latin typeface="Courier New"/>
+              </a:rPr>
+              <a:t> </a:t>
+            </a:r>
+          </a:p>
+          <a:p>
+            <a:pPr>
+              <a:defRPr sz="1200" b="0">
+                <a:solidFill>
+                  <a:srgbClr val="F8FAFC"/>
+                </a:solidFill>
+                <a:latin typeface="Courier New"/>
+              </a:defRPr>
+            </a:pPr>
+            <a:r>
+              <a:rPr sz="1200" b="0">
+                <a:solidFill>
+                  <a:srgbClr val="F8FAFC"/>
+                </a:solidFill>
+                <a:latin typeface="Courier New"/>
+              </a:rPr>
+              <a:t>seq_q, seq_k, d = 3, 4, 8</a:t>
+            </a:r>
+          </a:p>
+          <a:p>
+            <a:pPr>
+              <a:defRPr sz="1200" b="0">
+                <a:solidFill>
+                  <a:srgbClr val="F8FAFC"/>
+                </a:solidFill>
+                <a:latin typeface="Courier New"/>
+              </a:defRPr>
+            </a:pPr>
+            <a:r>
+              <a:rPr sz="1200" b="0">
+                <a:solidFill>
+                  <a:srgbClr val="F8FAFC"/>
+                </a:solidFill>
+                <a:latin typeface="Courier New"/>
+              </a:rPr>
+              <a:t>Q = rng.standard_normal((seq_q, d))</a:t>
+            </a:r>
+          </a:p>
+          <a:p>
+            <a:pPr>
+              <a:defRPr sz="1200" b="0">
+                <a:solidFill>
+                  <a:srgbClr val="F8FAFC"/>
+                </a:solidFill>
+                <a:latin typeface="Courier New"/>
+              </a:defRPr>
+            </a:pPr>
+            <a:r>
+              <a:rPr sz="1200" b="0">
+                <a:solidFill>
+                  <a:srgbClr val="F8FAFC"/>
+                </a:solidFill>
+                <a:latin typeface="Courier New"/>
+              </a:rPr>
+              <a:t>K = rng.standard_normal((seq_k, d))</a:t>
+            </a:r>
+          </a:p>
+          <a:p>
+            <a:pPr>
+              <a:defRPr sz="1200" b="0">
+                <a:solidFill>
+                  <a:srgbClr val="F8FAFC"/>
+                </a:solidFill>
+                <a:latin typeface="Courier New"/>
+              </a:defRPr>
+            </a:pPr>
+            <a:r>
+              <a:rPr sz="1200" b="0">
+                <a:solidFill>
+                  <a:srgbClr val="F8FAFC"/>
+                </a:solidFill>
+                <a:latin typeface="Courier New"/>
+              </a:rPr>
+              <a:t>V = rng.standard_normal((seq_k, d))</a:t>
+            </a:r>
+          </a:p>
+          <a:p>
+            <a:pPr>
+              <a:defRPr sz="1200" b="0">
+                <a:solidFill>
+                  <a:srgbClr val="F8FAFC"/>
+                </a:solidFill>
+                <a:latin typeface="Courier New"/>
+              </a:defRPr>
+            </a:pPr>
+            <a:r>
+              <a:rPr sz="1200" b="0">
+                <a:solidFill>
+                  <a:srgbClr val="F8FAFC"/>
+                </a:solidFill>
+                <a:latin typeface="Courier New"/>
+              </a:rPr>
+              <a:t># ... (truncado)</a:t>
             </a:r>
           </a:p>
         </p:txBody>

--- a/docs/presentaciones/classes/clase-142-mecanismos-de-atencion-presentacion.pptx
+++ b/docs/presentaciones/classes/clase-142-mecanismos-de-atencion-presentacion.pptx
@@ -3272,7 +3272,7 @@
                 </a:solidFill>
                 <a:latin typeface="Segoe UI"/>
               </a:rPr>
-              <a:t>Parte: 2 — Deep Learning · Fuente: Géron, cap. 16 § Attention Mechanisms + Bahdanau et al. (2015), Luong et al. (2015).  Duración estimada: 75 min.</a:t>
+              <a:t>Parte: 2 — Deep Learning · Fuente: Géron, cap. 16 § Attention Mechanisms + Bahdanau et al. (2015), Luong et al. (2015).  Duración estimada: 75 min. · Nivel: Avanzado</a:t>
             </a:r>
           </a:p>
         </p:txBody>
@@ -3581,7 +3581,7 @@
                 </a:solidFill>
                 <a:latin typeface="Segoe UI"/>
               </a:rPr>
-              <a:t>Parte: 2 — Deep Learning · Fuente: Géron, cap. 16 § Attention Mechanisms + Bahdanau et al. (2015), Luong et al. (2015).  Duración estimada: 75 min.</a:t>
+              <a:t>Parte: 2 — Deep Learning · Fuente: Géron, cap. 16 § Attention Mechanisms + Bahdanau et al. (2015), Luong et al. (2015).  Duración estimada: 75 min. · Nivel: Avanzado</a:t>
             </a:r>
           </a:p>
         </p:txBody>
